--- a/lectures/week10/lecture1/slides/week10_lecture1.pptx
+++ b/lectures/week10/lecture1/slides/week10_lecture1.pptx
@@ -308,7 +308,7 @@
           <a:p>
             <a:fld id="{2C1D2CCD-74E5-4836-9AA3-73B35EB7134E}" type="datetimeFigureOut">
               <a:rPr lang="en-CA" smtClean="0"/>
-              <a:t>2025-12-18</a:t>
+              <a:t>2026-03-14</a:t>
             </a:fld>
             <a:endParaRPr lang="en-CA"/>
           </a:p>
@@ -11280,14 +11280,14 @@
                   <a:schemeClr val="accent1"/>
                 </a:solidFill>
               </a:rPr>
-              <a:t>9.1</a:t>
+              <a:t>10.1</a:t>
             </a:r>
           </a:p>
           <a:p>
             <a:pPr lvl="1"/>
             <a:r>
-              <a:rPr lang="en-US" dirty="0"/>
-              <a:t>Cancelled</a:t>
+              <a:rPr lang="en-US" b="1" dirty="0"/>
+              <a:t>Objects, Classes, and Methods</a:t>
             </a:r>
           </a:p>
           <a:p>
@@ -11301,38 +11301,14 @@
                   <a:schemeClr val="accent1"/>
                 </a:solidFill>
               </a:rPr>
-              <a:t>9.2</a:t>
+              <a:t>10.2</a:t>
             </a:r>
           </a:p>
           <a:p>
             <a:pPr lvl="1"/>
             <a:r>
-              <a:rPr lang="en-US" b="1" dirty="0"/>
-              <a:t>objects</a:t>
-            </a:r>
-            <a:r>
-              <a:rPr lang="en-US" b="1" dirty="0">
-                <a:solidFill>
-                  <a:schemeClr val="accent2"/>
-                </a:solidFill>
-              </a:rPr>
-              <a:t>,</a:t>
-            </a:r>
-            <a:r>
-              <a:rPr lang="en-US" b="1" dirty="0"/>
-              <a:t> classes</a:t>
-            </a:r>
-            <a:r>
-              <a:rPr lang="en-US" b="1" dirty="0">
-                <a:solidFill>
-                  <a:schemeClr val="accent2"/>
-                </a:solidFill>
-              </a:rPr>
-              <a:t>,</a:t>
-            </a:r>
-            <a:r>
-              <a:rPr lang="en-US" b="1" dirty="0"/>
-              <a:t> and methods</a:t>
+              <a:rPr lang="en-US" dirty="0"/>
+              <a:t>Classes in Functions and Collections</a:t>
             </a:r>
           </a:p>
           <a:p>
@@ -11346,38 +11322,14 @@
                   <a:schemeClr val="accent1"/>
                 </a:solidFill>
               </a:rPr>
-              <a:t>9.3</a:t>
+              <a:t>10.3</a:t>
             </a:r>
           </a:p>
           <a:p>
             <a:pPr lvl="1"/>
             <a:r>
               <a:rPr lang="en-US" dirty="0"/>
-              <a:t>Classes in Classes</a:t>
-            </a:r>
-            <a:r>
-              <a:rPr lang="en-US" dirty="0">
-                <a:solidFill>
-                  <a:schemeClr val="accent2"/>
-                </a:solidFill>
-              </a:rPr>
-              <a:t>,</a:t>
-            </a:r>
-            <a:r>
-              <a:rPr lang="en-US" dirty="0"/>
-              <a:t> Functions</a:t>
-            </a:r>
-            <a:r>
-              <a:rPr lang="en-US" dirty="0">
-                <a:solidFill>
-                  <a:schemeClr val="accent2"/>
-                </a:solidFill>
-              </a:rPr>
-              <a:t>,</a:t>
-            </a:r>
-            <a:r>
-              <a:rPr lang="en-US" dirty="0"/>
-              <a:t> and Collections</a:t>
+              <a:t>Design Problem: Wordle Part 2 </a:t>
             </a:r>
           </a:p>
           <a:p>
